--- a/figure_repo.pptx
+++ b/figure_repo.pptx
@@ -5,7 +5,7 @@
     <p:sldMasterId id="2147483648" r:id="rId1"/>
   </p:sldMasterIdLst>
   <p:notesMasterIdLst>
-    <p:notesMasterId r:id="rId19"/>
+    <p:notesMasterId r:id="rId20"/>
   </p:notesMasterIdLst>
   <p:sldIdLst>
     <p:sldId id="262" r:id="rId2"/>
@@ -25,6 +25,7 @@
     <p:sldId id="264" r:id="rId16"/>
     <p:sldId id="268" r:id="rId17"/>
     <p:sldId id="272" r:id="rId18"/>
+    <p:sldId id="273" r:id="rId19"/>
   </p:sldIdLst>
   <p:sldSz cx="12192000" cy="6858000"/>
   <p:notesSz cx="6858000" cy="9144000"/>
@@ -213,7 +214,7 @@
           <a:p>
             <a:fld id="{D46C61D1-66D3-4DE1-B953-C6476FA6E46E}" type="datetimeFigureOut">
               <a:rPr lang="ko-KR" altLang="en-US" smtClean="0"/>
-              <a:t>2026-09-07</a:t>
+              <a:t>2026-09-08</a:t>
             </a:fld>
             <a:endParaRPr lang="ko-KR" altLang="en-US"/>
           </a:p>
@@ -711,7 +712,7 @@
           <a:p>
             <a:fld id="{CFFD65E5-7405-40DD-BA52-FA642F30707A}" type="datetimeFigureOut">
               <a:rPr lang="ko-KR" altLang="en-US" smtClean="0"/>
-              <a:t>2026-09-07</a:t>
+              <a:t>2026-09-08</a:t>
             </a:fld>
             <a:endParaRPr lang="ko-KR" altLang="en-US"/>
           </a:p>
@@ -909,7 +910,7 @@
           <a:p>
             <a:fld id="{CFFD65E5-7405-40DD-BA52-FA642F30707A}" type="datetimeFigureOut">
               <a:rPr lang="ko-KR" altLang="en-US" smtClean="0"/>
-              <a:t>2026-09-07</a:t>
+              <a:t>2026-09-08</a:t>
             </a:fld>
             <a:endParaRPr lang="ko-KR" altLang="en-US"/>
           </a:p>
@@ -1117,7 +1118,7 @@
           <a:p>
             <a:fld id="{CFFD65E5-7405-40DD-BA52-FA642F30707A}" type="datetimeFigureOut">
               <a:rPr lang="ko-KR" altLang="en-US" smtClean="0"/>
-              <a:t>2026-09-07</a:t>
+              <a:t>2026-09-08</a:t>
             </a:fld>
             <a:endParaRPr lang="ko-KR" altLang="en-US"/>
           </a:p>
@@ -1315,7 +1316,7 @@
           <a:p>
             <a:fld id="{CFFD65E5-7405-40DD-BA52-FA642F30707A}" type="datetimeFigureOut">
               <a:rPr lang="ko-KR" altLang="en-US" smtClean="0"/>
-              <a:t>2026-09-07</a:t>
+              <a:t>2026-09-08</a:t>
             </a:fld>
             <a:endParaRPr lang="ko-KR" altLang="en-US"/>
           </a:p>
@@ -1590,7 +1591,7 @@
           <a:p>
             <a:fld id="{CFFD65E5-7405-40DD-BA52-FA642F30707A}" type="datetimeFigureOut">
               <a:rPr lang="ko-KR" altLang="en-US" smtClean="0"/>
-              <a:t>2026-09-07</a:t>
+              <a:t>2026-09-08</a:t>
             </a:fld>
             <a:endParaRPr lang="ko-KR" altLang="en-US"/>
           </a:p>
@@ -1855,7 +1856,7 @@
           <a:p>
             <a:fld id="{CFFD65E5-7405-40DD-BA52-FA642F30707A}" type="datetimeFigureOut">
               <a:rPr lang="ko-KR" altLang="en-US" smtClean="0"/>
-              <a:t>2026-09-07</a:t>
+              <a:t>2026-09-08</a:t>
             </a:fld>
             <a:endParaRPr lang="ko-KR" altLang="en-US"/>
           </a:p>
@@ -2267,7 +2268,7 @@
           <a:p>
             <a:fld id="{CFFD65E5-7405-40DD-BA52-FA642F30707A}" type="datetimeFigureOut">
               <a:rPr lang="ko-KR" altLang="en-US" smtClean="0"/>
-              <a:t>2026-09-07</a:t>
+              <a:t>2026-09-08</a:t>
             </a:fld>
             <a:endParaRPr lang="ko-KR" altLang="en-US"/>
           </a:p>
@@ -2408,7 +2409,7 @@
           <a:p>
             <a:fld id="{CFFD65E5-7405-40DD-BA52-FA642F30707A}" type="datetimeFigureOut">
               <a:rPr lang="ko-KR" altLang="en-US" smtClean="0"/>
-              <a:t>2026-09-07</a:t>
+              <a:t>2026-09-08</a:t>
             </a:fld>
             <a:endParaRPr lang="ko-KR" altLang="en-US"/>
           </a:p>
@@ -2521,7 +2522,7 @@
           <a:p>
             <a:fld id="{CFFD65E5-7405-40DD-BA52-FA642F30707A}" type="datetimeFigureOut">
               <a:rPr lang="ko-KR" altLang="en-US" smtClean="0"/>
-              <a:t>2026-09-07</a:t>
+              <a:t>2026-09-08</a:t>
             </a:fld>
             <a:endParaRPr lang="ko-KR" altLang="en-US"/>
           </a:p>
@@ -2832,7 +2833,7 @@
           <a:p>
             <a:fld id="{CFFD65E5-7405-40DD-BA52-FA642F30707A}" type="datetimeFigureOut">
               <a:rPr lang="ko-KR" altLang="en-US" smtClean="0"/>
-              <a:t>2026-09-07</a:t>
+              <a:t>2026-09-08</a:t>
             </a:fld>
             <a:endParaRPr lang="ko-KR" altLang="en-US"/>
           </a:p>
@@ -3120,7 +3121,7 @@
           <a:p>
             <a:fld id="{CFFD65E5-7405-40DD-BA52-FA642F30707A}" type="datetimeFigureOut">
               <a:rPr lang="ko-KR" altLang="en-US" smtClean="0"/>
-              <a:t>2026-09-07</a:t>
+              <a:t>2026-09-08</a:t>
             </a:fld>
             <a:endParaRPr lang="ko-KR" altLang="en-US"/>
           </a:p>
@@ -3361,7 +3362,7 @@
           <a:p>
             <a:fld id="{CFFD65E5-7405-40DD-BA52-FA642F30707A}" type="datetimeFigureOut">
               <a:rPr lang="ko-KR" altLang="en-US" smtClean="0"/>
-              <a:t>2026-09-07</a:t>
+              <a:t>2026-09-08</a:t>
             </a:fld>
             <a:endParaRPr lang="ko-KR" altLang="en-US"/>
           </a:p>
@@ -5121,6 +5122,51 @@
           <a:chExt cx="0" cy="0"/>
         </a:xfrm>
       </p:grpSpPr>
+      <p:cxnSp>
+        <p:nvCxnSpPr>
+          <p:cNvPr id="37" name="연결선: 꺾임 36">
+            <a:extLst>
+              <a:ext uri="{FF2B5EF4-FFF2-40B4-BE49-F238E27FC236}">
+                <a16:creationId xmlns:a16="http://schemas.microsoft.com/office/drawing/2014/main" id="{4FAB46A4-B450-9A63-B5D1-6FF17E5A2347}"/>
+              </a:ext>
+            </a:extLst>
+          </p:cNvPr>
+          <p:cNvCxnSpPr>
+            <a:cxnSpLocks/>
+            <a:stCxn id="12" idx="3"/>
+            <a:endCxn id="44" idx="1"/>
+          </p:cNvCxnSpPr>
+          <p:nvPr/>
+        </p:nvCxnSpPr>
+        <p:spPr>
+          <a:xfrm>
+            <a:off x="6096000" y="979284"/>
+            <a:ext cx="2167032" cy="1972761"/>
+          </a:xfrm>
+          <a:prstGeom prst="bentConnector3">
+            <a:avLst>
+              <a:gd name="adj1" fmla="val 27236"/>
+            </a:avLst>
+          </a:prstGeom>
+          <a:ln w="19050">
+            <a:tailEnd type="triangle"/>
+          </a:ln>
+        </p:spPr>
+        <p:style>
+          <a:lnRef idx="1">
+            <a:schemeClr val="dk1"/>
+          </a:lnRef>
+          <a:fillRef idx="0">
+            <a:schemeClr val="dk1"/>
+          </a:fillRef>
+          <a:effectRef idx="0">
+            <a:schemeClr val="dk1"/>
+          </a:effectRef>
+          <a:fontRef idx="minor">
+            <a:schemeClr val="tx1"/>
+          </a:fontRef>
+        </p:style>
+      </p:cxnSp>
       <p:sp>
         <p:nvSpPr>
           <p:cNvPr id="10" name="직사각형 9">
@@ -5225,7 +5271,7 @@
         </p:nvSpPr>
         <p:spPr>
           <a:xfrm>
-            <a:off x="2467356" y="4518771"/>
+            <a:off x="2467356" y="5428921"/>
             <a:ext cx="496888" cy="954024"/>
           </a:xfrm>
           <a:prstGeom prst="rect">
@@ -5269,7 +5315,7 @@
         </p:nvSpPr>
         <p:spPr>
           <a:xfrm>
-            <a:off x="2467356" y="4518771"/>
+            <a:off x="2467356" y="5428921"/>
             <a:ext cx="496888" cy="326842"/>
           </a:xfrm>
           <a:prstGeom prst="flowChartMerge">
@@ -5315,7 +5361,7 @@
         </p:nvSpPr>
         <p:spPr>
           <a:xfrm>
-            <a:off x="3802380" y="4518771"/>
+            <a:off x="3802380" y="5428921"/>
             <a:ext cx="496888" cy="954024"/>
           </a:xfrm>
           <a:prstGeom prst="rect">
@@ -5359,7 +5405,7 @@
         </p:nvSpPr>
         <p:spPr>
           <a:xfrm>
-            <a:off x="3802380" y="4518771"/>
+            <a:off x="3802380" y="5428921"/>
             <a:ext cx="496888" cy="326842"/>
           </a:xfrm>
           <a:prstGeom prst="flowChartMerge">
@@ -5405,7 +5451,7 @@
         </p:nvSpPr>
         <p:spPr>
           <a:xfrm>
-            <a:off x="8263032" y="4518771"/>
+            <a:off x="8263032" y="5428921"/>
             <a:ext cx="496888" cy="954024"/>
           </a:xfrm>
           <a:prstGeom prst="rect">
@@ -5449,7 +5495,7 @@
         </p:nvSpPr>
         <p:spPr>
           <a:xfrm>
-            <a:off x="8263032" y="4518771"/>
+            <a:off x="8263032" y="5428921"/>
             <a:ext cx="496888" cy="326842"/>
           </a:xfrm>
           <a:prstGeom prst="flowChartMerge">
@@ -5498,7 +5544,7 @@
         </p:nvCxnSpPr>
         <p:spPr>
           <a:xfrm>
-            <a:off x="2964244" y="4995783"/>
+            <a:off x="2964244" y="5905933"/>
             <a:ext cx="838136" cy="0"/>
           </a:xfrm>
           <a:prstGeom prst="straightConnector1">
@@ -5540,7 +5586,7 @@
         </p:nvCxnSpPr>
         <p:spPr>
           <a:xfrm>
-            <a:off x="1629220" y="4995783"/>
+            <a:off x="1629220" y="5905933"/>
             <a:ext cx="838136" cy="0"/>
           </a:xfrm>
           <a:prstGeom prst="straightConnector1">
@@ -5583,7 +5629,7 @@
         </p:nvCxnSpPr>
         <p:spPr>
           <a:xfrm>
-            <a:off x="4299268" y="4995783"/>
+            <a:off x="4299268" y="5905933"/>
             <a:ext cx="1025652" cy="0"/>
           </a:xfrm>
           <a:prstGeom prst="straightConnector1">
@@ -5622,7 +5668,7 @@
         </p:nvSpPr>
         <p:spPr>
           <a:xfrm>
-            <a:off x="5324920" y="4518771"/>
+            <a:off x="5324920" y="5428921"/>
             <a:ext cx="496888" cy="954024"/>
           </a:xfrm>
           <a:prstGeom prst="rect">
@@ -5666,7 +5712,7 @@
         </p:nvSpPr>
         <p:spPr>
           <a:xfrm>
-            <a:off x="5324920" y="4518771"/>
+            <a:off x="5324920" y="5428921"/>
             <a:ext cx="496888" cy="326842"/>
           </a:xfrm>
           <a:prstGeom prst="flowChartMerge">
@@ -5716,7 +5762,7 @@
         </p:nvCxnSpPr>
         <p:spPr>
           <a:xfrm>
-            <a:off x="5821808" y="4995783"/>
+            <a:off x="5821808" y="5905933"/>
             <a:ext cx="2441224" cy="0"/>
           </a:xfrm>
           <a:prstGeom prst="straightConnector1">
@@ -6095,12 +6141,1039 @@
           </a:fontRef>
         </p:style>
       </p:cxnSp>
+      <p:sp>
+        <p:nvSpPr>
+          <p:cNvPr id="49" name="직사각형 48">
+            <a:extLst>
+              <a:ext uri="{FF2B5EF4-FFF2-40B4-BE49-F238E27FC236}">
+                <a16:creationId xmlns:a16="http://schemas.microsoft.com/office/drawing/2014/main" id="{6209575B-4795-BC25-5E6C-B66175FEB891}"/>
+              </a:ext>
+            </a:extLst>
+          </p:cNvPr>
+          <p:cNvSpPr/>
+          <p:nvPr/>
+        </p:nvSpPr>
+        <p:spPr>
+          <a:xfrm>
+            <a:off x="5324920" y="671021"/>
+            <a:ext cx="496888" cy="954024"/>
+          </a:xfrm>
+          <a:prstGeom prst="rect">
+            <a:avLst/>
+          </a:prstGeom>
+        </p:spPr>
+        <p:style>
+          <a:lnRef idx="2">
+            <a:schemeClr val="dk1"/>
+          </a:lnRef>
+          <a:fillRef idx="1">
+            <a:schemeClr val="lt1"/>
+          </a:fillRef>
+          <a:effectRef idx="0">
+            <a:schemeClr val="dk1"/>
+          </a:effectRef>
+          <a:fontRef idx="minor">
+            <a:schemeClr val="dk1"/>
+          </a:fontRef>
+        </p:style>
+        <p:txBody>
+          <a:bodyPr rtlCol="0" anchor="ctr"/>
+          <a:lstStyle/>
+          <a:p>
+            <a:pPr algn="ctr"/>
+            <a:endParaRPr lang="ko-KR" altLang="en-US"/>
+          </a:p>
+        </p:txBody>
+      </p:sp>
+      <p:sp>
+        <p:nvSpPr>
+          <p:cNvPr id="50" name="순서도: 병합 49">
+            <a:extLst>
+              <a:ext uri="{FF2B5EF4-FFF2-40B4-BE49-F238E27FC236}">
+                <a16:creationId xmlns:a16="http://schemas.microsoft.com/office/drawing/2014/main" id="{F0D7C408-3983-A3AC-189D-1FB6654188D1}"/>
+              </a:ext>
+            </a:extLst>
+          </p:cNvPr>
+          <p:cNvSpPr/>
+          <p:nvPr/>
+        </p:nvSpPr>
+        <p:spPr>
+          <a:xfrm>
+            <a:off x="5324920" y="671021"/>
+            <a:ext cx="496888" cy="326842"/>
+          </a:xfrm>
+          <a:prstGeom prst="flowChartMerge">
+            <a:avLst/>
+          </a:prstGeom>
+        </p:spPr>
+        <p:style>
+          <a:lnRef idx="2">
+            <a:schemeClr val="accent1">
+              <a:shade val="15000"/>
+            </a:schemeClr>
+          </a:lnRef>
+          <a:fillRef idx="1">
+            <a:schemeClr val="accent1"/>
+          </a:fillRef>
+          <a:effectRef idx="0">
+            <a:schemeClr val="accent1"/>
+          </a:effectRef>
+          <a:fontRef idx="minor">
+            <a:schemeClr val="lt1"/>
+          </a:fontRef>
+        </p:style>
+        <p:txBody>
+          <a:bodyPr rtlCol="0" anchor="ctr"/>
+          <a:lstStyle/>
+          <a:p>
+            <a:pPr algn="ctr"/>
+            <a:endParaRPr lang="ko-KR" altLang="en-US"/>
+          </a:p>
+        </p:txBody>
+      </p:sp>
+      <p:sp>
+        <p:nvSpPr>
+          <p:cNvPr id="12" name="직사각형 11">
+            <a:extLst>
+              <a:ext uri="{FF2B5EF4-FFF2-40B4-BE49-F238E27FC236}">
+                <a16:creationId xmlns:a16="http://schemas.microsoft.com/office/drawing/2014/main" id="{11274E4E-074A-EEBC-52E6-8F3931D46311}"/>
+              </a:ext>
+            </a:extLst>
+          </p:cNvPr>
+          <p:cNvSpPr/>
+          <p:nvPr/>
+        </p:nvSpPr>
+        <p:spPr>
+          <a:xfrm>
+            <a:off x="5181600" y="207051"/>
+            <a:ext cx="914400" cy="1544466"/>
+          </a:xfrm>
+          <a:prstGeom prst="rect">
+            <a:avLst/>
+          </a:prstGeom>
+        </p:spPr>
+        <p:style>
+          <a:lnRef idx="2">
+            <a:schemeClr val="accent1">
+              <a:shade val="15000"/>
+            </a:schemeClr>
+          </a:lnRef>
+          <a:fillRef idx="1">
+            <a:schemeClr val="accent1"/>
+          </a:fillRef>
+          <a:effectRef idx="0">
+            <a:schemeClr val="accent1"/>
+          </a:effectRef>
+          <a:fontRef idx="minor">
+            <a:schemeClr val="lt1"/>
+          </a:fontRef>
+        </p:style>
+        <p:txBody>
+          <a:bodyPr rtlCol="0" anchor="ctr"/>
+          <a:lstStyle/>
+          <a:p>
+            <a:pPr algn="ctr"/>
+            <a:r>
+              <a:rPr lang="en-US" altLang="ko-KR" dirty="0"/>
+              <a:t>PB</a:t>
+            </a:r>
+          </a:p>
+          <a:p>
+            <a:pPr algn="ctr"/>
+            <a:r>
+              <a:rPr lang="en-US" altLang="ko-KR" dirty="0"/>
+              <a:t>read</a:t>
+            </a:r>
+            <a:endParaRPr lang="ko-KR" altLang="en-US" dirty="0"/>
+          </a:p>
+        </p:txBody>
+      </p:sp>
+      <p:sp>
+        <p:nvSpPr>
+          <p:cNvPr id="65" name="직사각형 64">
+            <a:extLst>
+              <a:ext uri="{FF2B5EF4-FFF2-40B4-BE49-F238E27FC236}">
+                <a16:creationId xmlns:a16="http://schemas.microsoft.com/office/drawing/2014/main" id="{31E528CB-8F01-FBF2-A3E0-6C6F228C875C}"/>
+              </a:ext>
+            </a:extLst>
+          </p:cNvPr>
+          <p:cNvSpPr/>
+          <p:nvPr/>
+        </p:nvSpPr>
+        <p:spPr>
+          <a:xfrm>
+            <a:off x="6978332" y="2474976"/>
+            <a:ext cx="914400" cy="914400"/>
+          </a:xfrm>
+          <a:prstGeom prst="rect">
+            <a:avLst/>
+          </a:prstGeom>
+          <a:solidFill>
+            <a:schemeClr val="accent2"/>
+          </a:solidFill>
+        </p:spPr>
+        <p:style>
+          <a:lnRef idx="2">
+            <a:schemeClr val="accent1">
+              <a:shade val="15000"/>
+            </a:schemeClr>
+          </a:lnRef>
+          <a:fillRef idx="1">
+            <a:schemeClr val="accent1"/>
+          </a:fillRef>
+          <a:effectRef idx="0">
+            <a:schemeClr val="accent1"/>
+          </a:effectRef>
+          <a:fontRef idx="minor">
+            <a:schemeClr val="lt1"/>
+          </a:fontRef>
+        </p:style>
+        <p:txBody>
+          <a:bodyPr rtlCol="0" anchor="ctr"/>
+          <a:lstStyle/>
+          <a:p>
+            <a:pPr algn="ctr"/>
+            <a:r>
+              <a:rPr lang="en-US" altLang="ko-KR" dirty="0"/>
+              <a:t>re-</a:t>
+            </a:r>
+          </a:p>
+          <a:p>
+            <a:pPr algn="ctr"/>
+            <a:r>
+              <a:rPr lang="en-US" altLang="ko-KR" dirty="0"/>
+              <a:t>quant</a:t>
+            </a:r>
+            <a:endParaRPr lang="ko-KR" altLang="en-US" dirty="0"/>
+          </a:p>
+        </p:txBody>
+      </p:sp>
+      <p:sp>
+        <p:nvSpPr>
+          <p:cNvPr id="69" name="순서도: 병합 68">
+            <a:extLst>
+              <a:ext uri="{FF2B5EF4-FFF2-40B4-BE49-F238E27FC236}">
+                <a16:creationId xmlns:a16="http://schemas.microsoft.com/office/drawing/2014/main" id="{BBB0DEDF-1E35-630B-C345-DBE87CB110EC}"/>
+              </a:ext>
+            </a:extLst>
+          </p:cNvPr>
+          <p:cNvSpPr/>
+          <p:nvPr/>
+        </p:nvSpPr>
+        <p:spPr>
+          <a:xfrm>
+            <a:off x="5390356" y="204709"/>
+            <a:ext cx="496888" cy="326842"/>
+          </a:xfrm>
+          <a:prstGeom prst="flowChartMerge">
+            <a:avLst/>
+          </a:prstGeom>
+        </p:spPr>
+        <p:style>
+          <a:lnRef idx="2">
+            <a:schemeClr val="dk1"/>
+          </a:lnRef>
+          <a:fillRef idx="1">
+            <a:schemeClr val="lt1"/>
+          </a:fillRef>
+          <a:effectRef idx="0">
+            <a:schemeClr val="dk1"/>
+          </a:effectRef>
+          <a:fontRef idx="minor">
+            <a:schemeClr val="dk1"/>
+          </a:fontRef>
+        </p:style>
+        <p:txBody>
+          <a:bodyPr rtlCol="0" anchor="ctr"/>
+          <a:lstStyle/>
+          <a:p>
+            <a:pPr algn="ctr"/>
+            <a:endParaRPr lang="ko-KR" altLang="en-US"/>
+          </a:p>
+        </p:txBody>
+      </p:sp>
       <p:cxnSp>
         <p:nvCxnSpPr>
-          <p:cNvPr id="48" name="직선 화살표 연결선 47">
-            <a:extLst>
-              <a:ext uri="{FF2B5EF4-FFF2-40B4-BE49-F238E27FC236}">
-                <a16:creationId xmlns:a16="http://schemas.microsoft.com/office/drawing/2014/main" id="{494FE64F-A7AB-A7C5-CE4F-D1D839DF3654}"/>
+          <p:cNvPr id="75" name="직선 화살표 연결선 74">
+            <a:extLst>
+              <a:ext uri="{FF2B5EF4-FFF2-40B4-BE49-F238E27FC236}">
+                <a16:creationId xmlns:a16="http://schemas.microsoft.com/office/drawing/2014/main" id="{B9B24745-0481-1C62-6470-6CF859F58502}"/>
+              </a:ext>
+            </a:extLst>
+          </p:cNvPr>
+          <p:cNvCxnSpPr>
+            <a:cxnSpLocks/>
+            <a:stCxn id="44" idx="3"/>
+            <a:endCxn id="10" idx="1"/>
+          </p:cNvCxnSpPr>
+          <p:nvPr/>
+        </p:nvCxnSpPr>
+        <p:spPr>
+          <a:xfrm flipV="1">
+            <a:off x="8759920" y="2951988"/>
+            <a:ext cx="1725866" cy="57"/>
+          </a:xfrm>
+          <a:prstGeom prst="straightConnector1">
+            <a:avLst/>
+          </a:prstGeom>
+          <a:ln w="28575">
+            <a:tailEnd type="triangle"/>
+          </a:ln>
+        </p:spPr>
+        <p:style>
+          <a:lnRef idx="1">
+            <a:schemeClr val="dk1"/>
+          </a:lnRef>
+          <a:fillRef idx="0">
+            <a:schemeClr val="dk1"/>
+          </a:fillRef>
+          <a:effectRef idx="0">
+            <a:schemeClr val="dk1"/>
+          </a:effectRef>
+          <a:fontRef idx="minor">
+            <a:schemeClr val="tx1"/>
+          </a:fontRef>
+        </p:style>
+      </p:cxnSp>
+      <p:sp>
+        <p:nvSpPr>
+          <p:cNvPr id="74" name="직사각형 73">
+            <a:extLst>
+              <a:ext uri="{FF2B5EF4-FFF2-40B4-BE49-F238E27FC236}">
+                <a16:creationId xmlns:a16="http://schemas.microsoft.com/office/drawing/2014/main" id="{DC1B0346-CCC0-D9CA-58A7-627ED8F5F62D}"/>
+              </a:ext>
+            </a:extLst>
+          </p:cNvPr>
+          <p:cNvSpPr/>
+          <p:nvPr/>
+        </p:nvSpPr>
+        <p:spPr>
+          <a:xfrm>
+            <a:off x="9174931" y="2494788"/>
+            <a:ext cx="914400" cy="914400"/>
+          </a:xfrm>
+          <a:prstGeom prst="rect">
+            <a:avLst/>
+          </a:prstGeom>
+          <a:solidFill>
+            <a:schemeClr val="accent6"/>
+          </a:solidFill>
+        </p:spPr>
+        <p:style>
+          <a:lnRef idx="2">
+            <a:schemeClr val="accent1">
+              <a:shade val="15000"/>
+            </a:schemeClr>
+          </a:lnRef>
+          <a:fillRef idx="1">
+            <a:schemeClr val="accent1"/>
+          </a:fillRef>
+          <a:effectRef idx="0">
+            <a:schemeClr val="accent1"/>
+          </a:effectRef>
+          <a:fontRef idx="minor">
+            <a:schemeClr val="lt1"/>
+          </a:fontRef>
+        </p:style>
+        <p:txBody>
+          <a:bodyPr rtlCol="0" anchor="ctr"/>
+          <a:lstStyle/>
+          <a:p>
+            <a:pPr algn="ctr"/>
+            <a:r>
+              <a:rPr lang="en-US" altLang="ko-KR" dirty="0"/>
+              <a:t>max</a:t>
+            </a:r>
+          </a:p>
+          <a:p>
+            <a:pPr algn="ctr"/>
+            <a:r>
+              <a:rPr lang="en-US" altLang="ko-KR" dirty="0"/>
+              <a:t>pool</a:t>
+            </a:r>
+            <a:endParaRPr lang="ko-KR" altLang="en-US" dirty="0"/>
+          </a:p>
+        </p:txBody>
+      </p:sp>
+      <p:cxnSp>
+        <p:nvCxnSpPr>
+          <p:cNvPr id="79" name="연결선: 꺾임 78">
+            <a:extLst>
+              <a:ext uri="{FF2B5EF4-FFF2-40B4-BE49-F238E27FC236}">
+                <a16:creationId xmlns:a16="http://schemas.microsoft.com/office/drawing/2014/main" id="{075BFB51-B0DD-6D83-248B-5495DEA2D933}"/>
+              </a:ext>
+            </a:extLst>
+          </p:cNvPr>
+          <p:cNvCxnSpPr>
+            <a:stCxn id="17" idx="3"/>
+            <a:endCxn id="74" idx="2"/>
+          </p:cNvCxnSpPr>
+          <p:nvPr/>
+        </p:nvCxnSpPr>
+        <p:spPr>
+          <a:xfrm flipV="1">
+            <a:off x="8759920" y="3409188"/>
+            <a:ext cx="872211" cy="2496745"/>
+          </a:xfrm>
+          <a:prstGeom prst="bentConnector2">
+            <a:avLst/>
+          </a:prstGeom>
+          <a:ln w="19050">
+            <a:tailEnd type="triangle"/>
+          </a:ln>
+        </p:spPr>
+        <p:style>
+          <a:lnRef idx="1">
+            <a:schemeClr val="dk1"/>
+          </a:lnRef>
+          <a:fillRef idx="0">
+            <a:schemeClr val="dk1"/>
+          </a:fillRef>
+          <a:effectRef idx="0">
+            <a:schemeClr val="dk1"/>
+          </a:effectRef>
+          <a:fontRef idx="minor">
+            <a:schemeClr val="tx1"/>
+          </a:fontRef>
+        </p:style>
+      </p:cxnSp>
+      <p:sp>
+        <p:nvSpPr>
+          <p:cNvPr id="85" name="TextBox 84">
+            <a:extLst>
+              <a:ext uri="{FF2B5EF4-FFF2-40B4-BE49-F238E27FC236}">
+                <a16:creationId xmlns:a16="http://schemas.microsoft.com/office/drawing/2014/main" id="{7C228032-026B-5861-278D-4BBC63F4004C}"/>
+              </a:ext>
+            </a:extLst>
+          </p:cNvPr>
+          <p:cNvSpPr txBox="1"/>
+          <p:nvPr/>
+        </p:nvSpPr>
+        <p:spPr>
+          <a:xfrm>
+            <a:off x="225486" y="5721267"/>
+            <a:ext cx="1435008" cy="369332"/>
+          </a:xfrm>
+          <a:prstGeom prst="rect">
+            <a:avLst/>
+          </a:prstGeom>
+          <a:noFill/>
+        </p:spPr>
+        <p:txBody>
+          <a:bodyPr wrap="none" rtlCol="0">
+            <a:spAutoFit/>
+          </a:bodyPr>
+          <a:lstStyle/>
+          <a:p>
+            <a:r>
+              <a:rPr lang="en-US" altLang="ko-KR" dirty="0" err="1"/>
+              <a:t>En_maxpool</a:t>
+            </a:r>
+            <a:endParaRPr lang="ko-KR" altLang="en-US" dirty="0"/>
+          </a:p>
+        </p:txBody>
+      </p:sp>
+      <p:sp>
+        <p:nvSpPr>
+          <p:cNvPr id="86" name="TextBox 85">
+            <a:extLst>
+              <a:ext uri="{FF2B5EF4-FFF2-40B4-BE49-F238E27FC236}">
+                <a16:creationId xmlns:a16="http://schemas.microsoft.com/office/drawing/2014/main" id="{A4C1FE5D-B829-7F9A-24A4-49557F074975}"/>
+              </a:ext>
+            </a:extLst>
+          </p:cNvPr>
+          <p:cNvSpPr txBox="1"/>
+          <p:nvPr/>
+        </p:nvSpPr>
+        <p:spPr>
+          <a:xfrm>
+            <a:off x="710143" y="2743045"/>
+            <a:ext cx="984500" cy="646331"/>
+          </a:xfrm>
+          <a:prstGeom prst="rect">
+            <a:avLst/>
+          </a:prstGeom>
+          <a:noFill/>
+        </p:spPr>
+        <p:txBody>
+          <a:bodyPr wrap="none" rtlCol="0">
+            <a:spAutoFit/>
+          </a:bodyPr>
+          <a:lstStyle/>
+          <a:p>
+            <a:r>
+              <a:rPr lang="en-US" altLang="ko-KR" dirty="0"/>
+              <a:t>Valid+</a:t>
+            </a:r>
+          </a:p>
+          <a:p>
+            <a:r>
+              <a:rPr lang="en-US" altLang="ko-KR" dirty="0"/>
+              <a:t>address</a:t>
+            </a:r>
+            <a:endParaRPr lang="ko-KR" altLang="en-US" dirty="0"/>
+          </a:p>
+        </p:txBody>
+      </p:sp>
+      <p:sp>
+        <p:nvSpPr>
+          <p:cNvPr id="87" name="TextBox 86">
+            <a:extLst>
+              <a:ext uri="{FF2B5EF4-FFF2-40B4-BE49-F238E27FC236}">
+                <a16:creationId xmlns:a16="http://schemas.microsoft.com/office/drawing/2014/main" id="{0A75EDD2-31A0-D1C1-A613-8F837B52CD6A}"/>
+              </a:ext>
+            </a:extLst>
+          </p:cNvPr>
+          <p:cNvSpPr txBox="1"/>
+          <p:nvPr/>
+        </p:nvSpPr>
+        <p:spPr>
+          <a:xfrm>
+            <a:off x="6201813" y="609952"/>
+            <a:ext cx="670376" cy="369332"/>
+          </a:xfrm>
+          <a:prstGeom prst="rect">
+            <a:avLst/>
+          </a:prstGeom>
+          <a:noFill/>
+        </p:spPr>
+        <p:txBody>
+          <a:bodyPr wrap="none" rtlCol="0">
+            <a:spAutoFit/>
+          </a:bodyPr>
+          <a:lstStyle/>
+          <a:p>
+            <a:r>
+              <a:rPr lang="en-US" altLang="ko-KR" dirty="0"/>
+              <a:t>Data</a:t>
+            </a:r>
+            <a:endParaRPr lang="ko-KR" altLang="en-US" dirty="0"/>
+          </a:p>
+        </p:txBody>
+      </p:sp>
+      <p:cxnSp>
+        <p:nvCxnSpPr>
+          <p:cNvPr id="88" name="직선 화살표 연결선 87">
+            <a:extLst>
+              <a:ext uri="{FF2B5EF4-FFF2-40B4-BE49-F238E27FC236}">
+                <a16:creationId xmlns:a16="http://schemas.microsoft.com/office/drawing/2014/main" id="{ED2340D0-0F12-322E-D004-2DF74AB2E2CF}"/>
+              </a:ext>
+            </a:extLst>
+          </p:cNvPr>
+          <p:cNvCxnSpPr>
+            <a:cxnSpLocks/>
+          </p:cNvCxnSpPr>
+          <p:nvPr/>
+        </p:nvCxnSpPr>
+        <p:spPr>
+          <a:xfrm>
+            <a:off x="10982674" y="2958700"/>
+            <a:ext cx="853655" cy="0"/>
+          </a:xfrm>
+          <a:prstGeom prst="straightConnector1">
+            <a:avLst/>
+          </a:prstGeom>
+          <a:ln w="28575">
+            <a:tailEnd type="triangle"/>
+          </a:ln>
+        </p:spPr>
+        <p:style>
+          <a:lnRef idx="1">
+            <a:schemeClr val="dk1"/>
+          </a:lnRef>
+          <a:fillRef idx="0">
+            <a:schemeClr val="dk1"/>
+          </a:fillRef>
+          <a:effectRef idx="0">
+            <a:schemeClr val="dk1"/>
+          </a:effectRef>
+          <a:fontRef idx="minor">
+            <a:schemeClr val="tx1"/>
+          </a:fontRef>
+        </p:style>
+      </p:cxnSp>
+      <p:sp>
+        <p:nvSpPr>
+          <p:cNvPr id="3" name="직사각형 2">
+            <a:extLst>
+              <a:ext uri="{FF2B5EF4-FFF2-40B4-BE49-F238E27FC236}">
+                <a16:creationId xmlns:a16="http://schemas.microsoft.com/office/drawing/2014/main" id="{FD9FB941-7754-E27F-DC3E-321EAE2C8C1F}"/>
+              </a:ext>
+            </a:extLst>
+          </p:cNvPr>
+          <p:cNvSpPr/>
+          <p:nvPr/>
+        </p:nvSpPr>
+        <p:spPr>
+          <a:xfrm>
+            <a:off x="2467356" y="4208952"/>
+            <a:ext cx="496888" cy="954024"/>
+          </a:xfrm>
+          <a:prstGeom prst="rect">
+            <a:avLst/>
+          </a:prstGeom>
+        </p:spPr>
+        <p:style>
+          <a:lnRef idx="2">
+            <a:schemeClr val="dk1"/>
+          </a:lnRef>
+          <a:fillRef idx="1">
+            <a:schemeClr val="lt1"/>
+          </a:fillRef>
+          <a:effectRef idx="0">
+            <a:schemeClr val="dk1"/>
+          </a:effectRef>
+          <a:fontRef idx="minor">
+            <a:schemeClr val="dk1"/>
+          </a:fontRef>
+        </p:style>
+        <p:txBody>
+          <a:bodyPr rtlCol="0" anchor="ctr"/>
+          <a:lstStyle/>
+          <a:p>
+            <a:pPr algn="ctr"/>
+            <a:endParaRPr lang="ko-KR" altLang="en-US"/>
+          </a:p>
+        </p:txBody>
+      </p:sp>
+      <p:sp>
+        <p:nvSpPr>
+          <p:cNvPr id="4" name="순서도: 병합 3">
+            <a:extLst>
+              <a:ext uri="{FF2B5EF4-FFF2-40B4-BE49-F238E27FC236}">
+                <a16:creationId xmlns:a16="http://schemas.microsoft.com/office/drawing/2014/main" id="{BCA0FCAC-6ACC-065D-FCFC-D3F49D63A794}"/>
+              </a:ext>
+            </a:extLst>
+          </p:cNvPr>
+          <p:cNvSpPr/>
+          <p:nvPr/>
+        </p:nvSpPr>
+        <p:spPr>
+          <a:xfrm>
+            <a:off x="2467356" y="4208952"/>
+            <a:ext cx="496888" cy="326842"/>
+          </a:xfrm>
+          <a:prstGeom prst="flowChartMerge">
+            <a:avLst/>
+          </a:prstGeom>
+        </p:spPr>
+        <p:style>
+          <a:lnRef idx="2">
+            <a:schemeClr val="accent1">
+              <a:shade val="15000"/>
+            </a:schemeClr>
+          </a:lnRef>
+          <a:fillRef idx="1">
+            <a:schemeClr val="accent1"/>
+          </a:fillRef>
+          <a:effectRef idx="0">
+            <a:schemeClr val="accent1"/>
+          </a:effectRef>
+          <a:fontRef idx="minor">
+            <a:schemeClr val="lt1"/>
+          </a:fontRef>
+        </p:style>
+        <p:txBody>
+          <a:bodyPr rtlCol="0" anchor="ctr"/>
+          <a:lstStyle/>
+          <a:p>
+            <a:pPr algn="ctr"/>
+            <a:endParaRPr lang="ko-KR" altLang="en-US"/>
+          </a:p>
+        </p:txBody>
+      </p:sp>
+      <p:sp>
+        <p:nvSpPr>
+          <p:cNvPr id="5" name="직사각형 4">
+            <a:extLst>
+              <a:ext uri="{FF2B5EF4-FFF2-40B4-BE49-F238E27FC236}">
+                <a16:creationId xmlns:a16="http://schemas.microsoft.com/office/drawing/2014/main" id="{E2AEC375-4658-6DC5-A5CE-7D59A3CCF1A5}"/>
+              </a:ext>
+            </a:extLst>
+          </p:cNvPr>
+          <p:cNvSpPr/>
+          <p:nvPr/>
+        </p:nvSpPr>
+        <p:spPr>
+          <a:xfrm>
+            <a:off x="3802380" y="4208952"/>
+            <a:ext cx="496888" cy="954024"/>
+          </a:xfrm>
+          <a:prstGeom prst="rect">
+            <a:avLst/>
+          </a:prstGeom>
+        </p:spPr>
+        <p:style>
+          <a:lnRef idx="2">
+            <a:schemeClr val="dk1"/>
+          </a:lnRef>
+          <a:fillRef idx="1">
+            <a:schemeClr val="lt1"/>
+          </a:fillRef>
+          <a:effectRef idx="0">
+            <a:schemeClr val="dk1"/>
+          </a:effectRef>
+          <a:fontRef idx="minor">
+            <a:schemeClr val="dk1"/>
+          </a:fontRef>
+        </p:style>
+        <p:txBody>
+          <a:bodyPr rtlCol="0" anchor="ctr"/>
+          <a:lstStyle/>
+          <a:p>
+            <a:pPr algn="ctr"/>
+            <a:endParaRPr lang="ko-KR" altLang="en-US"/>
+          </a:p>
+        </p:txBody>
+      </p:sp>
+      <p:sp>
+        <p:nvSpPr>
+          <p:cNvPr id="6" name="순서도: 병합 5">
+            <a:extLst>
+              <a:ext uri="{FF2B5EF4-FFF2-40B4-BE49-F238E27FC236}">
+                <a16:creationId xmlns:a16="http://schemas.microsoft.com/office/drawing/2014/main" id="{B6B099EE-F74D-8955-9695-9657E5F373A8}"/>
+              </a:ext>
+            </a:extLst>
+          </p:cNvPr>
+          <p:cNvSpPr/>
+          <p:nvPr/>
+        </p:nvSpPr>
+        <p:spPr>
+          <a:xfrm>
+            <a:off x="3802380" y="4208952"/>
+            <a:ext cx="496888" cy="326842"/>
+          </a:xfrm>
+          <a:prstGeom prst="flowChartMerge">
+            <a:avLst/>
+          </a:prstGeom>
+        </p:spPr>
+        <p:style>
+          <a:lnRef idx="2">
+            <a:schemeClr val="accent1">
+              <a:shade val="15000"/>
+            </a:schemeClr>
+          </a:lnRef>
+          <a:fillRef idx="1">
+            <a:schemeClr val="accent1"/>
+          </a:fillRef>
+          <a:effectRef idx="0">
+            <a:schemeClr val="accent1"/>
+          </a:effectRef>
+          <a:fontRef idx="minor">
+            <a:schemeClr val="lt1"/>
+          </a:fontRef>
+        </p:style>
+        <p:txBody>
+          <a:bodyPr rtlCol="0" anchor="ctr"/>
+          <a:lstStyle/>
+          <a:p>
+            <a:pPr algn="ctr"/>
+            <a:endParaRPr lang="ko-KR" altLang="en-US"/>
+          </a:p>
+        </p:txBody>
+      </p:sp>
+      <p:cxnSp>
+        <p:nvCxnSpPr>
+          <p:cNvPr id="9" name="직선 화살표 연결선 8">
+            <a:extLst>
+              <a:ext uri="{FF2B5EF4-FFF2-40B4-BE49-F238E27FC236}">
+                <a16:creationId xmlns:a16="http://schemas.microsoft.com/office/drawing/2014/main" id="{8CD69DFB-C82B-821F-6CC6-FD14D0D89867}"/>
+              </a:ext>
+            </a:extLst>
+          </p:cNvPr>
+          <p:cNvCxnSpPr>
+            <a:stCxn id="3" idx="3"/>
+            <a:endCxn id="5" idx="1"/>
+          </p:cNvCxnSpPr>
+          <p:nvPr/>
+        </p:nvCxnSpPr>
+        <p:spPr>
+          <a:xfrm>
+            <a:off x="2964244" y="4685964"/>
+            <a:ext cx="838136" cy="0"/>
+          </a:xfrm>
+          <a:prstGeom prst="straightConnector1">
+            <a:avLst/>
+          </a:prstGeom>
+          <a:ln w="28575">
+            <a:tailEnd type="triangle"/>
+          </a:ln>
+        </p:spPr>
+        <p:style>
+          <a:lnRef idx="1">
+            <a:schemeClr val="dk1"/>
+          </a:lnRef>
+          <a:fillRef idx="0">
+            <a:schemeClr val="dk1"/>
+          </a:fillRef>
+          <a:effectRef idx="0">
+            <a:schemeClr val="dk1"/>
+          </a:effectRef>
+          <a:fontRef idx="minor">
+            <a:schemeClr val="tx1"/>
+          </a:fontRef>
+        </p:style>
+      </p:cxnSp>
+      <p:cxnSp>
+        <p:nvCxnSpPr>
+          <p:cNvPr id="19" name="직선 화살표 연결선 18">
+            <a:extLst>
+              <a:ext uri="{FF2B5EF4-FFF2-40B4-BE49-F238E27FC236}">
+                <a16:creationId xmlns:a16="http://schemas.microsoft.com/office/drawing/2014/main" id="{FF24598D-1A43-8C26-7872-CCFE59EF0A25}"/>
+              </a:ext>
+            </a:extLst>
+          </p:cNvPr>
+          <p:cNvCxnSpPr>
+            <a:cxnSpLocks/>
+            <a:endCxn id="3" idx="1"/>
+          </p:cNvCxnSpPr>
+          <p:nvPr/>
+        </p:nvCxnSpPr>
+        <p:spPr>
+          <a:xfrm>
+            <a:off x="1629220" y="4685964"/>
+            <a:ext cx="838136" cy="0"/>
+          </a:xfrm>
+          <a:prstGeom prst="straightConnector1">
+            <a:avLst/>
+          </a:prstGeom>
+          <a:ln w="28575">
+            <a:tailEnd type="triangle"/>
+          </a:ln>
+        </p:spPr>
+        <p:style>
+          <a:lnRef idx="1">
+            <a:schemeClr val="dk1"/>
+          </a:lnRef>
+          <a:fillRef idx="0">
+            <a:schemeClr val="dk1"/>
+          </a:fillRef>
+          <a:effectRef idx="0">
+            <a:schemeClr val="dk1"/>
+          </a:effectRef>
+          <a:fontRef idx="minor">
+            <a:schemeClr val="tx1"/>
+          </a:fontRef>
+        </p:style>
+      </p:cxnSp>
+      <p:cxnSp>
+        <p:nvCxnSpPr>
+          <p:cNvPr id="20" name="직선 화살표 연결선 19">
+            <a:extLst>
+              <a:ext uri="{FF2B5EF4-FFF2-40B4-BE49-F238E27FC236}">
+                <a16:creationId xmlns:a16="http://schemas.microsoft.com/office/drawing/2014/main" id="{5BE9C9D2-42E0-2A70-D04E-11B98389F71D}"/>
+              </a:ext>
+            </a:extLst>
+          </p:cNvPr>
+          <p:cNvCxnSpPr>
+            <a:cxnSpLocks/>
+            <a:stCxn id="5" idx="3"/>
+            <a:endCxn id="21" idx="1"/>
+          </p:cNvCxnSpPr>
+          <p:nvPr/>
+        </p:nvCxnSpPr>
+        <p:spPr>
+          <a:xfrm>
+            <a:off x="4299268" y="4685964"/>
+            <a:ext cx="1025652" cy="0"/>
+          </a:xfrm>
+          <a:prstGeom prst="straightConnector1">
+            <a:avLst/>
+          </a:prstGeom>
+          <a:ln w="28575">
+            <a:tailEnd type="triangle"/>
+          </a:ln>
+        </p:spPr>
+        <p:style>
+          <a:lnRef idx="1">
+            <a:schemeClr val="dk1"/>
+          </a:lnRef>
+          <a:fillRef idx="0">
+            <a:schemeClr val="dk1"/>
+          </a:fillRef>
+          <a:effectRef idx="0">
+            <a:schemeClr val="dk1"/>
+          </a:effectRef>
+          <a:fontRef idx="minor">
+            <a:schemeClr val="tx1"/>
+          </a:fontRef>
+        </p:style>
+      </p:cxnSp>
+      <p:sp>
+        <p:nvSpPr>
+          <p:cNvPr id="21" name="직사각형 20">
+            <a:extLst>
+              <a:ext uri="{FF2B5EF4-FFF2-40B4-BE49-F238E27FC236}">
+                <a16:creationId xmlns:a16="http://schemas.microsoft.com/office/drawing/2014/main" id="{15D8F8ED-1425-30BC-BE35-E4F1591AAEA9}"/>
+              </a:ext>
+            </a:extLst>
+          </p:cNvPr>
+          <p:cNvSpPr/>
+          <p:nvPr/>
+        </p:nvSpPr>
+        <p:spPr>
+          <a:xfrm>
+            <a:off x="5324920" y="4208952"/>
+            <a:ext cx="496888" cy="954024"/>
+          </a:xfrm>
+          <a:prstGeom prst="rect">
+            <a:avLst/>
+          </a:prstGeom>
+        </p:spPr>
+        <p:style>
+          <a:lnRef idx="2">
+            <a:schemeClr val="dk1"/>
+          </a:lnRef>
+          <a:fillRef idx="1">
+            <a:schemeClr val="lt1"/>
+          </a:fillRef>
+          <a:effectRef idx="0">
+            <a:schemeClr val="dk1"/>
+          </a:effectRef>
+          <a:fontRef idx="minor">
+            <a:schemeClr val="dk1"/>
+          </a:fontRef>
+        </p:style>
+        <p:txBody>
+          <a:bodyPr rtlCol="0" anchor="ctr"/>
+          <a:lstStyle/>
+          <a:p>
+            <a:pPr algn="ctr"/>
+            <a:endParaRPr lang="ko-KR" altLang="en-US"/>
+          </a:p>
+        </p:txBody>
+      </p:sp>
+      <p:sp>
+        <p:nvSpPr>
+          <p:cNvPr id="23" name="순서도: 병합 22">
+            <a:extLst>
+              <a:ext uri="{FF2B5EF4-FFF2-40B4-BE49-F238E27FC236}">
+                <a16:creationId xmlns:a16="http://schemas.microsoft.com/office/drawing/2014/main" id="{A745DE1B-F2D6-4E76-7000-4B97269EAEF8}"/>
+              </a:ext>
+            </a:extLst>
+          </p:cNvPr>
+          <p:cNvSpPr/>
+          <p:nvPr/>
+        </p:nvSpPr>
+        <p:spPr>
+          <a:xfrm>
+            <a:off x="5324920" y="4208952"/>
+            <a:ext cx="496888" cy="326842"/>
+          </a:xfrm>
+          <a:prstGeom prst="flowChartMerge">
+            <a:avLst/>
+          </a:prstGeom>
+        </p:spPr>
+        <p:style>
+          <a:lnRef idx="2">
+            <a:schemeClr val="accent1">
+              <a:shade val="15000"/>
+            </a:schemeClr>
+          </a:lnRef>
+          <a:fillRef idx="1">
+            <a:schemeClr val="accent1"/>
+          </a:fillRef>
+          <a:effectRef idx="0">
+            <a:schemeClr val="accent1"/>
+          </a:effectRef>
+          <a:fontRef idx="minor">
+            <a:schemeClr val="lt1"/>
+          </a:fontRef>
+        </p:style>
+        <p:txBody>
+          <a:bodyPr rtlCol="0" anchor="ctr"/>
+          <a:lstStyle/>
+          <a:p>
+            <a:pPr algn="ctr"/>
+            <a:endParaRPr lang="ko-KR" altLang="en-US"/>
+          </a:p>
+        </p:txBody>
+      </p:sp>
+      <p:sp>
+        <p:nvSpPr>
+          <p:cNvPr id="27" name="TextBox 26">
+            <a:extLst>
+              <a:ext uri="{FF2B5EF4-FFF2-40B4-BE49-F238E27FC236}">
+                <a16:creationId xmlns:a16="http://schemas.microsoft.com/office/drawing/2014/main" id="{92B6F7B8-32ED-6E30-B63A-B85AE36FB8E3}"/>
+              </a:ext>
+            </a:extLst>
+          </p:cNvPr>
+          <p:cNvSpPr txBox="1"/>
+          <p:nvPr/>
+        </p:nvSpPr>
+        <p:spPr>
+          <a:xfrm>
+            <a:off x="225486" y="4501298"/>
+            <a:ext cx="1341970" cy="369332"/>
+          </a:xfrm>
+          <a:prstGeom prst="rect">
+            <a:avLst/>
+          </a:prstGeom>
+          <a:noFill/>
+        </p:spPr>
+        <p:txBody>
+          <a:bodyPr wrap="none" rtlCol="0">
+            <a:spAutoFit/>
+          </a:bodyPr>
+          <a:lstStyle/>
+          <a:p>
+            <a:r>
+              <a:rPr lang="en-US" altLang="ko-KR" dirty="0" err="1"/>
+              <a:t>En_requant</a:t>
+            </a:r>
+            <a:endParaRPr lang="ko-KR" altLang="en-US" dirty="0"/>
+          </a:p>
+        </p:txBody>
+      </p:sp>
+      <p:cxnSp>
+        <p:nvCxnSpPr>
+          <p:cNvPr id="31" name="연결선: 꺾임 30">
+            <a:extLst>
+              <a:ext uri="{FF2B5EF4-FFF2-40B4-BE49-F238E27FC236}">
+                <a16:creationId xmlns:a16="http://schemas.microsoft.com/office/drawing/2014/main" id="{C59D6D1F-2BBE-1E92-A77D-52E7E9141243}"/>
+              </a:ext>
+            </a:extLst>
+          </p:cNvPr>
+          <p:cNvCxnSpPr>
+            <a:cxnSpLocks/>
+            <a:stCxn id="21" idx="3"/>
+            <a:endCxn id="65" idx="2"/>
+          </p:cNvCxnSpPr>
+          <p:nvPr/>
+        </p:nvCxnSpPr>
+        <p:spPr>
+          <a:xfrm flipV="1">
+            <a:off x="5821808" y="3389376"/>
+            <a:ext cx="1613724" cy="1296588"/>
+          </a:xfrm>
+          <a:prstGeom prst="bentConnector2">
+            <a:avLst/>
+          </a:prstGeom>
+          <a:ln w="19050">
+            <a:tailEnd type="triangle"/>
+          </a:ln>
+        </p:spPr>
+        <p:style>
+          <a:lnRef idx="1">
+            <a:schemeClr val="dk1"/>
+          </a:lnRef>
+          <a:fillRef idx="0">
+            <a:schemeClr val="dk1"/>
+          </a:fillRef>
+          <a:effectRef idx="0">
+            <a:schemeClr val="dk1"/>
+          </a:effectRef>
+          <a:fontRef idx="minor">
+            <a:schemeClr val="tx1"/>
+          </a:fontRef>
+        </p:style>
+      </p:cxnSp>
+      <p:cxnSp>
+        <p:nvCxnSpPr>
+          <p:cNvPr id="53" name="연결선: 꺾임 52">
+            <a:extLst>
+              <a:ext uri="{FF2B5EF4-FFF2-40B4-BE49-F238E27FC236}">
+                <a16:creationId xmlns:a16="http://schemas.microsoft.com/office/drawing/2014/main" id="{0A6420CF-40A1-68B8-6576-544E7FF1DEE1}"/>
               </a:ext>
             </a:extLst>
           </p:cNvPr>
@@ -6112,644 +7185,16 @@
           <p:nvPr/>
         </p:nvCxnSpPr>
         <p:spPr>
-          <a:xfrm>
-            <a:off x="4299268" y="2952045"/>
-            <a:ext cx="882332" cy="4631"/>
-          </a:xfrm>
-          <a:prstGeom prst="straightConnector1">
-            <a:avLst/>
-          </a:prstGeom>
-          <a:ln w="28575">
-            <a:tailEnd type="triangle"/>
-          </a:ln>
-        </p:spPr>
-        <p:style>
-          <a:lnRef idx="1">
-            <a:schemeClr val="dk1"/>
-          </a:lnRef>
-          <a:fillRef idx="0">
-            <a:schemeClr val="dk1"/>
-          </a:fillRef>
-          <a:effectRef idx="0">
-            <a:schemeClr val="dk1"/>
-          </a:effectRef>
-          <a:fontRef idx="minor">
-            <a:schemeClr val="tx1"/>
-          </a:fontRef>
-        </p:style>
-      </p:cxnSp>
-      <p:sp>
-        <p:nvSpPr>
-          <p:cNvPr id="49" name="직사각형 48">
-            <a:extLst>
-              <a:ext uri="{FF2B5EF4-FFF2-40B4-BE49-F238E27FC236}">
-                <a16:creationId xmlns:a16="http://schemas.microsoft.com/office/drawing/2014/main" id="{6209575B-4795-BC25-5E6C-B66175FEB891}"/>
-              </a:ext>
-            </a:extLst>
-          </p:cNvPr>
-          <p:cNvSpPr/>
-          <p:nvPr/>
-        </p:nvSpPr>
-        <p:spPr>
-          <a:xfrm>
-            <a:off x="5324920" y="2475033"/>
-            <a:ext cx="496888" cy="954024"/>
-          </a:xfrm>
-          <a:prstGeom prst="rect">
-            <a:avLst/>
-          </a:prstGeom>
-        </p:spPr>
-        <p:style>
-          <a:lnRef idx="2">
-            <a:schemeClr val="dk1"/>
-          </a:lnRef>
-          <a:fillRef idx="1">
-            <a:schemeClr val="lt1"/>
-          </a:fillRef>
-          <a:effectRef idx="0">
-            <a:schemeClr val="dk1"/>
-          </a:effectRef>
-          <a:fontRef idx="minor">
-            <a:schemeClr val="dk1"/>
-          </a:fontRef>
-        </p:style>
-        <p:txBody>
-          <a:bodyPr rtlCol="0" anchor="ctr"/>
-          <a:lstStyle/>
-          <a:p>
-            <a:pPr algn="ctr"/>
-            <a:endParaRPr lang="ko-KR" altLang="en-US"/>
-          </a:p>
-        </p:txBody>
-      </p:sp>
-      <p:sp>
-        <p:nvSpPr>
-          <p:cNvPr id="50" name="순서도: 병합 49">
-            <a:extLst>
-              <a:ext uri="{FF2B5EF4-FFF2-40B4-BE49-F238E27FC236}">
-                <a16:creationId xmlns:a16="http://schemas.microsoft.com/office/drawing/2014/main" id="{F0D7C408-3983-A3AC-189D-1FB6654188D1}"/>
-              </a:ext>
-            </a:extLst>
-          </p:cNvPr>
-          <p:cNvSpPr/>
-          <p:nvPr/>
-        </p:nvSpPr>
-        <p:spPr>
-          <a:xfrm>
-            <a:off x="5324920" y="2475033"/>
-            <a:ext cx="496888" cy="326842"/>
-          </a:xfrm>
-          <a:prstGeom prst="flowChartMerge">
-            <a:avLst/>
-          </a:prstGeom>
-        </p:spPr>
-        <p:style>
-          <a:lnRef idx="2">
-            <a:schemeClr val="accent1">
-              <a:shade val="15000"/>
-            </a:schemeClr>
-          </a:lnRef>
-          <a:fillRef idx="1">
-            <a:schemeClr val="accent1"/>
-          </a:fillRef>
-          <a:effectRef idx="0">
-            <a:schemeClr val="accent1"/>
-          </a:effectRef>
-          <a:fontRef idx="minor">
-            <a:schemeClr val="lt1"/>
-          </a:fontRef>
-        </p:style>
-        <p:txBody>
-          <a:bodyPr rtlCol="0" anchor="ctr"/>
-          <a:lstStyle/>
-          <a:p>
-            <a:pPr algn="ctr"/>
-            <a:endParaRPr lang="ko-KR" altLang="en-US"/>
-          </a:p>
-        </p:txBody>
-      </p:sp>
-      <p:cxnSp>
-        <p:nvCxnSpPr>
-          <p:cNvPr id="51" name="직선 화살표 연결선 50">
-            <a:extLst>
-              <a:ext uri="{FF2B5EF4-FFF2-40B4-BE49-F238E27FC236}">
-                <a16:creationId xmlns:a16="http://schemas.microsoft.com/office/drawing/2014/main" id="{40874C55-0949-23ED-508C-04716A9F6946}"/>
-              </a:ext>
-            </a:extLst>
-          </p:cNvPr>
-          <p:cNvCxnSpPr>
-            <a:cxnSpLocks/>
-            <a:stCxn id="49" idx="3"/>
-            <a:endCxn id="44" idx="1"/>
-          </p:cNvCxnSpPr>
-          <p:nvPr/>
-        </p:nvCxnSpPr>
-        <p:spPr>
-          <a:xfrm>
-            <a:off x="5821808" y="2952045"/>
-            <a:ext cx="2441224" cy="0"/>
-          </a:xfrm>
-          <a:prstGeom prst="straightConnector1">
-            <a:avLst/>
-          </a:prstGeom>
-          <a:ln w="28575">
-            <a:tailEnd type="triangle"/>
-          </a:ln>
-        </p:spPr>
-        <p:style>
-          <a:lnRef idx="1">
-            <a:schemeClr val="dk1"/>
-          </a:lnRef>
-          <a:fillRef idx="0">
-            <a:schemeClr val="dk1"/>
-          </a:fillRef>
-          <a:effectRef idx="0">
-            <a:schemeClr val="dk1"/>
-          </a:effectRef>
-          <a:fontRef idx="minor">
-            <a:schemeClr val="tx1"/>
-          </a:fontRef>
-        </p:style>
-      </p:cxnSp>
-      <p:sp>
-        <p:nvSpPr>
-          <p:cNvPr id="12" name="직사각형 11">
-            <a:extLst>
-              <a:ext uri="{FF2B5EF4-FFF2-40B4-BE49-F238E27FC236}">
-                <a16:creationId xmlns:a16="http://schemas.microsoft.com/office/drawing/2014/main" id="{11274E4E-074A-EEBC-52E6-8F3931D46311}"/>
-              </a:ext>
-            </a:extLst>
-          </p:cNvPr>
-          <p:cNvSpPr/>
-          <p:nvPr/>
-        </p:nvSpPr>
-        <p:spPr>
-          <a:xfrm>
-            <a:off x="5181600" y="2011063"/>
-            <a:ext cx="914400" cy="1891226"/>
-          </a:xfrm>
-          <a:prstGeom prst="rect">
-            <a:avLst/>
-          </a:prstGeom>
-        </p:spPr>
-        <p:style>
-          <a:lnRef idx="2">
-            <a:schemeClr val="accent1">
-              <a:shade val="15000"/>
-            </a:schemeClr>
-          </a:lnRef>
-          <a:fillRef idx="1">
-            <a:schemeClr val="accent1"/>
-          </a:fillRef>
-          <a:effectRef idx="0">
-            <a:schemeClr val="accent1"/>
-          </a:effectRef>
-          <a:fontRef idx="minor">
-            <a:schemeClr val="lt1"/>
-          </a:fontRef>
-        </p:style>
-        <p:txBody>
-          <a:bodyPr rtlCol="0" anchor="ctr"/>
-          <a:lstStyle/>
-          <a:p>
-            <a:pPr algn="ctr"/>
-            <a:r>
-              <a:rPr lang="en-US" altLang="ko-KR" dirty="0"/>
-              <a:t>PB</a:t>
-            </a:r>
-          </a:p>
-          <a:p>
-            <a:pPr algn="ctr"/>
-            <a:r>
-              <a:rPr lang="en-US" altLang="ko-KR" dirty="0"/>
-              <a:t>read</a:t>
-            </a:r>
-            <a:endParaRPr lang="ko-KR" altLang="en-US" dirty="0"/>
-          </a:p>
-        </p:txBody>
-      </p:sp>
-      <p:sp>
-        <p:nvSpPr>
-          <p:cNvPr id="65" name="직사각형 64">
-            <a:extLst>
-              <a:ext uri="{FF2B5EF4-FFF2-40B4-BE49-F238E27FC236}">
-                <a16:creationId xmlns:a16="http://schemas.microsoft.com/office/drawing/2014/main" id="{31E528CB-8F01-FBF2-A3E0-6C6F228C875C}"/>
-              </a:ext>
-            </a:extLst>
-          </p:cNvPr>
-          <p:cNvSpPr/>
-          <p:nvPr/>
-        </p:nvSpPr>
-        <p:spPr>
-          <a:xfrm>
-            <a:off x="6978332" y="2474976"/>
-            <a:ext cx="914400" cy="914400"/>
-          </a:xfrm>
-          <a:prstGeom prst="rect">
-            <a:avLst/>
-          </a:prstGeom>
-          <a:solidFill>
-            <a:schemeClr val="accent2"/>
-          </a:solidFill>
-        </p:spPr>
-        <p:style>
-          <a:lnRef idx="2">
-            <a:schemeClr val="accent1">
-              <a:shade val="15000"/>
-            </a:schemeClr>
-          </a:lnRef>
-          <a:fillRef idx="1">
-            <a:schemeClr val="accent1"/>
-          </a:fillRef>
-          <a:effectRef idx="0">
-            <a:schemeClr val="accent1"/>
-          </a:effectRef>
-          <a:fontRef idx="minor">
-            <a:schemeClr val="lt1"/>
-          </a:fontRef>
-        </p:style>
-        <p:txBody>
-          <a:bodyPr rtlCol="0" anchor="ctr"/>
-          <a:lstStyle/>
-          <a:p>
-            <a:pPr algn="ctr"/>
-            <a:r>
-              <a:rPr lang="en-US" altLang="ko-KR" dirty="0"/>
-              <a:t>re-</a:t>
-            </a:r>
-          </a:p>
-          <a:p>
-            <a:pPr algn="ctr"/>
-            <a:r>
-              <a:rPr lang="en-US" altLang="ko-KR" dirty="0"/>
-              <a:t>quant</a:t>
-            </a:r>
-            <a:endParaRPr lang="ko-KR" altLang="en-US" dirty="0"/>
-          </a:p>
-        </p:txBody>
-      </p:sp>
-      <p:sp>
-        <p:nvSpPr>
-          <p:cNvPr id="69" name="순서도: 병합 68">
-            <a:extLst>
-              <a:ext uri="{FF2B5EF4-FFF2-40B4-BE49-F238E27FC236}">
-                <a16:creationId xmlns:a16="http://schemas.microsoft.com/office/drawing/2014/main" id="{BBB0DEDF-1E35-630B-C345-DBE87CB110EC}"/>
-              </a:ext>
-            </a:extLst>
-          </p:cNvPr>
-          <p:cNvSpPr/>
-          <p:nvPr/>
-        </p:nvSpPr>
-        <p:spPr>
-          <a:xfrm>
-            <a:off x="5390356" y="2008721"/>
-            <a:ext cx="496888" cy="326842"/>
-          </a:xfrm>
-          <a:prstGeom prst="flowChartMerge">
-            <a:avLst/>
-          </a:prstGeom>
-        </p:spPr>
-        <p:style>
-          <a:lnRef idx="2">
-            <a:schemeClr val="dk1"/>
-          </a:lnRef>
-          <a:fillRef idx="1">
-            <a:schemeClr val="lt1"/>
-          </a:fillRef>
-          <a:effectRef idx="0">
-            <a:schemeClr val="dk1"/>
-          </a:effectRef>
-          <a:fontRef idx="minor">
-            <a:schemeClr val="dk1"/>
-          </a:fontRef>
-        </p:style>
-        <p:txBody>
-          <a:bodyPr rtlCol="0" anchor="ctr"/>
-          <a:lstStyle/>
-          <a:p>
-            <a:pPr algn="ctr"/>
-            <a:endParaRPr lang="ko-KR" altLang="en-US"/>
-          </a:p>
-        </p:txBody>
-      </p:sp>
-      <p:cxnSp>
-        <p:nvCxnSpPr>
-          <p:cNvPr id="70" name="직선 화살표 연결선 69">
-            <a:extLst>
-              <a:ext uri="{FF2B5EF4-FFF2-40B4-BE49-F238E27FC236}">
-                <a16:creationId xmlns:a16="http://schemas.microsoft.com/office/drawing/2014/main" id="{081BCDC9-A698-F29F-6D0F-7E9DC3D830AC}"/>
-              </a:ext>
-            </a:extLst>
-          </p:cNvPr>
-          <p:cNvCxnSpPr>
-            <a:cxnSpLocks/>
-            <a:endCxn id="65" idx="2"/>
-          </p:cNvCxnSpPr>
-          <p:nvPr/>
-        </p:nvCxnSpPr>
-        <p:spPr>
           <a:xfrm flipV="1">
-            <a:off x="7435532" y="3389376"/>
-            <a:ext cx="0" cy="1606407"/>
-          </a:xfrm>
-          <a:prstGeom prst="straightConnector1">
-            <a:avLst/>
-          </a:prstGeom>
-          <a:ln w="28575">
-            <a:tailEnd type="triangle"/>
-          </a:ln>
-        </p:spPr>
-        <p:style>
-          <a:lnRef idx="1">
-            <a:schemeClr val="dk1"/>
-          </a:lnRef>
-          <a:fillRef idx="0">
-            <a:schemeClr val="dk1"/>
-          </a:fillRef>
-          <a:effectRef idx="0">
-            <a:schemeClr val="dk1"/>
-          </a:effectRef>
-          <a:fontRef idx="minor">
-            <a:schemeClr val="tx1"/>
-          </a:fontRef>
-        </p:style>
-      </p:cxnSp>
-      <p:cxnSp>
-        <p:nvCxnSpPr>
-          <p:cNvPr id="75" name="직선 화살표 연결선 74">
-            <a:extLst>
-              <a:ext uri="{FF2B5EF4-FFF2-40B4-BE49-F238E27FC236}">
-                <a16:creationId xmlns:a16="http://schemas.microsoft.com/office/drawing/2014/main" id="{B9B24745-0481-1C62-6470-6CF859F58502}"/>
-              </a:ext>
-            </a:extLst>
-          </p:cNvPr>
-          <p:cNvCxnSpPr>
-            <a:cxnSpLocks/>
-            <a:stCxn id="44" idx="3"/>
-            <a:endCxn id="10" idx="1"/>
-          </p:cNvCxnSpPr>
-          <p:nvPr/>
-        </p:nvCxnSpPr>
-        <p:spPr>
-          <a:xfrm flipV="1">
-            <a:off x="8759920" y="2951988"/>
-            <a:ext cx="1725866" cy="57"/>
-          </a:xfrm>
-          <a:prstGeom prst="straightConnector1">
-            <a:avLst/>
-          </a:prstGeom>
-          <a:ln w="28575">
-            <a:tailEnd type="triangle"/>
-          </a:ln>
-        </p:spPr>
-        <p:style>
-          <a:lnRef idx="1">
-            <a:schemeClr val="dk1"/>
-          </a:lnRef>
-          <a:fillRef idx="0">
-            <a:schemeClr val="dk1"/>
-          </a:fillRef>
-          <a:effectRef idx="0">
-            <a:schemeClr val="dk1"/>
-          </a:effectRef>
-          <a:fontRef idx="minor">
-            <a:schemeClr val="tx1"/>
-          </a:fontRef>
-        </p:style>
-      </p:cxnSp>
-      <p:sp>
-        <p:nvSpPr>
-          <p:cNvPr id="74" name="직사각형 73">
-            <a:extLst>
-              <a:ext uri="{FF2B5EF4-FFF2-40B4-BE49-F238E27FC236}">
-                <a16:creationId xmlns:a16="http://schemas.microsoft.com/office/drawing/2014/main" id="{DC1B0346-CCC0-D9CA-58A7-627ED8F5F62D}"/>
-              </a:ext>
-            </a:extLst>
-          </p:cNvPr>
-          <p:cNvSpPr/>
-          <p:nvPr/>
-        </p:nvSpPr>
-        <p:spPr>
-          <a:xfrm>
-            <a:off x="9174931" y="2494788"/>
-            <a:ext cx="914400" cy="914400"/>
-          </a:xfrm>
-          <a:prstGeom prst="rect">
-            <a:avLst/>
-          </a:prstGeom>
-          <a:solidFill>
-            <a:schemeClr val="accent6"/>
-          </a:solidFill>
-        </p:spPr>
-        <p:style>
-          <a:lnRef idx="2">
-            <a:schemeClr val="accent1">
-              <a:shade val="15000"/>
-            </a:schemeClr>
-          </a:lnRef>
-          <a:fillRef idx="1">
-            <a:schemeClr val="accent1"/>
-          </a:fillRef>
-          <a:effectRef idx="0">
-            <a:schemeClr val="accent1"/>
-          </a:effectRef>
-          <a:fontRef idx="minor">
-            <a:schemeClr val="lt1"/>
-          </a:fontRef>
-        </p:style>
-        <p:txBody>
-          <a:bodyPr rtlCol="0" anchor="ctr"/>
-          <a:lstStyle/>
-          <a:p>
-            <a:pPr algn="ctr"/>
-            <a:r>
-              <a:rPr lang="en-US" altLang="ko-KR" dirty="0"/>
-              <a:t>max</a:t>
-            </a:r>
-          </a:p>
-          <a:p>
-            <a:pPr algn="ctr"/>
-            <a:r>
-              <a:rPr lang="en-US" altLang="ko-KR" dirty="0"/>
-              <a:t>pool</a:t>
-            </a:r>
-            <a:endParaRPr lang="ko-KR" altLang="en-US" dirty="0"/>
-          </a:p>
-        </p:txBody>
-      </p:sp>
-      <p:cxnSp>
-        <p:nvCxnSpPr>
-          <p:cNvPr id="79" name="연결선: 꺾임 78">
-            <a:extLst>
-              <a:ext uri="{FF2B5EF4-FFF2-40B4-BE49-F238E27FC236}">
-                <a16:creationId xmlns:a16="http://schemas.microsoft.com/office/drawing/2014/main" id="{075BFB51-B0DD-6D83-248B-5495DEA2D933}"/>
-              </a:ext>
-            </a:extLst>
-          </p:cNvPr>
-          <p:cNvCxnSpPr>
-            <a:stCxn id="17" idx="3"/>
-            <a:endCxn id="74" idx="2"/>
-          </p:cNvCxnSpPr>
-          <p:nvPr/>
-        </p:nvCxnSpPr>
-        <p:spPr>
-          <a:xfrm flipV="1">
-            <a:off x="8759920" y="3409188"/>
-            <a:ext cx="872211" cy="1586595"/>
-          </a:xfrm>
-          <a:prstGeom prst="bentConnector2">
-            <a:avLst/>
+            <a:off x="4299268" y="979284"/>
+            <a:ext cx="882332" cy="1972761"/>
+          </a:xfrm>
+          <a:prstGeom prst="bentConnector3">
+            <a:avLst>
+              <a:gd name="adj1" fmla="val 50000"/>
+            </a:avLst>
           </a:prstGeom>
           <a:ln w="19050">
-            <a:tailEnd type="triangle"/>
-          </a:ln>
-        </p:spPr>
-        <p:style>
-          <a:lnRef idx="1">
-            <a:schemeClr val="dk1"/>
-          </a:lnRef>
-          <a:fillRef idx="0">
-            <a:schemeClr val="dk1"/>
-          </a:fillRef>
-          <a:effectRef idx="0">
-            <a:schemeClr val="dk1"/>
-          </a:effectRef>
-          <a:fontRef idx="minor">
-            <a:schemeClr val="tx1"/>
-          </a:fontRef>
-        </p:style>
-      </p:cxnSp>
-      <p:sp>
-        <p:nvSpPr>
-          <p:cNvPr id="85" name="TextBox 84">
-            <a:extLst>
-              <a:ext uri="{FF2B5EF4-FFF2-40B4-BE49-F238E27FC236}">
-                <a16:creationId xmlns:a16="http://schemas.microsoft.com/office/drawing/2014/main" id="{7C228032-026B-5861-278D-4BBC63F4004C}"/>
-              </a:ext>
-            </a:extLst>
-          </p:cNvPr>
-          <p:cNvSpPr txBox="1"/>
-          <p:nvPr/>
-        </p:nvSpPr>
-        <p:spPr>
-          <a:xfrm>
-            <a:off x="225486" y="4811117"/>
-            <a:ext cx="1435008" cy="369332"/>
-          </a:xfrm>
-          <a:prstGeom prst="rect">
-            <a:avLst/>
-          </a:prstGeom>
-          <a:noFill/>
-        </p:spPr>
-        <p:txBody>
-          <a:bodyPr wrap="none" rtlCol="0">
-            <a:spAutoFit/>
-          </a:bodyPr>
-          <a:lstStyle/>
-          <a:p>
-            <a:r>
-              <a:rPr lang="en-US" altLang="ko-KR" dirty="0" err="1"/>
-              <a:t>En_maxpool</a:t>
-            </a:r>
-            <a:endParaRPr lang="ko-KR" altLang="en-US" dirty="0"/>
-          </a:p>
-        </p:txBody>
-      </p:sp>
-      <p:sp>
-        <p:nvSpPr>
-          <p:cNvPr id="86" name="TextBox 85">
-            <a:extLst>
-              <a:ext uri="{FF2B5EF4-FFF2-40B4-BE49-F238E27FC236}">
-                <a16:creationId xmlns:a16="http://schemas.microsoft.com/office/drawing/2014/main" id="{A4C1FE5D-B829-7F9A-24A4-49557F074975}"/>
-              </a:ext>
-            </a:extLst>
-          </p:cNvPr>
-          <p:cNvSpPr txBox="1"/>
-          <p:nvPr/>
-        </p:nvSpPr>
-        <p:spPr>
-          <a:xfrm>
-            <a:off x="940166" y="2747510"/>
-            <a:ext cx="684546" cy="369332"/>
-          </a:xfrm>
-          <a:prstGeom prst="rect">
-            <a:avLst/>
-          </a:prstGeom>
-          <a:noFill/>
-        </p:spPr>
-        <p:txBody>
-          <a:bodyPr wrap="none" rtlCol="0">
-            <a:spAutoFit/>
-          </a:bodyPr>
-          <a:lstStyle/>
-          <a:p>
-            <a:r>
-              <a:rPr lang="en-US" altLang="ko-KR" dirty="0"/>
-              <a:t>Valid</a:t>
-            </a:r>
-            <a:endParaRPr lang="ko-KR" altLang="en-US" dirty="0"/>
-          </a:p>
-        </p:txBody>
-      </p:sp>
-      <p:sp>
-        <p:nvSpPr>
-          <p:cNvPr id="87" name="TextBox 86">
-            <a:extLst>
-              <a:ext uri="{FF2B5EF4-FFF2-40B4-BE49-F238E27FC236}">
-                <a16:creationId xmlns:a16="http://schemas.microsoft.com/office/drawing/2014/main" id="{0A75EDD2-31A0-D1C1-A613-8F837B52CD6A}"/>
-              </a:ext>
-            </a:extLst>
-          </p:cNvPr>
-          <p:cNvSpPr txBox="1"/>
-          <p:nvPr/>
-        </p:nvSpPr>
-        <p:spPr>
-          <a:xfrm>
-            <a:off x="6241346" y="2617152"/>
-            <a:ext cx="670376" cy="369332"/>
-          </a:xfrm>
-          <a:prstGeom prst="rect">
-            <a:avLst/>
-          </a:prstGeom>
-          <a:noFill/>
-        </p:spPr>
-        <p:txBody>
-          <a:bodyPr wrap="none" rtlCol="0">
-            <a:spAutoFit/>
-          </a:bodyPr>
-          <a:lstStyle/>
-          <a:p>
-            <a:r>
-              <a:rPr lang="en-US" altLang="ko-KR" dirty="0"/>
-              <a:t>Data</a:t>
-            </a:r>
-            <a:endParaRPr lang="ko-KR" altLang="en-US" dirty="0"/>
-          </a:p>
-        </p:txBody>
-      </p:sp>
-      <p:cxnSp>
-        <p:nvCxnSpPr>
-          <p:cNvPr id="88" name="직선 화살표 연결선 87">
-            <a:extLst>
-              <a:ext uri="{FF2B5EF4-FFF2-40B4-BE49-F238E27FC236}">
-                <a16:creationId xmlns:a16="http://schemas.microsoft.com/office/drawing/2014/main" id="{ED2340D0-0F12-322E-D004-2DF74AB2E2CF}"/>
-              </a:ext>
-            </a:extLst>
-          </p:cNvPr>
-          <p:cNvCxnSpPr>
-            <a:cxnSpLocks/>
-          </p:cNvCxnSpPr>
-          <p:nvPr/>
-        </p:nvCxnSpPr>
-        <p:spPr>
-          <a:xfrm>
-            <a:off x="10982674" y="2958700"/>
-            <a:ext cx="853655" cy="0"/>
-          </a:xfrm>
-          <a:prstGeom prst="straightConnector1">
-            <a:avLst/>
-          </a:prstGeom>
-          <a:ln w="28575">
             <a:tailEnd type="triangle"/>
           </a:ln>
         </p:spPr>
@@ -6829,10 +7274,10 @@
       </p:sp>
       <p:pic>
         <p:nvPicPr>
-          <p:cNvPr id="7" name="그림 6">
-            <a:extLst>
-              <a:ext uri="{FF2B5EF4-FFF2-40B4-BE49-F238E27FC236}">
-                <a16:creationId xmlns:a16="http://schemas.microsoft.com/office/drawing/2014/main" id="{C5484F91-A086-5B09-0600-0347521152DC}"/>
+          <p:cNvPr id="4" name="그림 3">
+            <a:extLst>
+              <a:ext uri="{FF2B5EF4-FFF2-40B4-BE49-F238E27FC236}">
+                <a16:creationId xmlns:a16="http://schemas.microsoft.com/office/drawing/2014/main" id="{603C1F45-AD81-B4E8-E2B2-B3C51FB5D478}"/>
               </a:ext>
             </a:extLst>
           </p:cNvPr>
@@ -6849,8 +7294,8 @@
         </p:blipFill>
         <p:spPr>
           <a:xfrm>
-            <a:off x="0" y="1422348"/>
-            <a:ext cx="12192000" cy="2484950"/>
+            <a:off x="0" y="1510267"/>
+            <a:ext cx="12192000" cy="2586182"/>
           </a:xfrm>
           <a:prstGeom prst="rect">
             <a:avLst/>
@@ -6859,10 +7304,10 @@
       </p:pic>
       <p:pic>
         <p:nvPicPr>
-          <p:cNvPr id="9" name="그림 8">
-            <a:extLst>
-              <a:ext uri="{FF2B5EF4-FFF2-40B4-BE49-F238E27FC236}">
-                <a16:creationId xmlns:a16="http://schemas.microsoft.com/office/drawing/2014/main" id="{1C661D13-DFDB-6E1B-17AC-D40008B33F15}"/>
+          <p:cNvPr id="6" name="그림 5">
+            <a:extLst>
+              <a:ext uri="{FF2B5EF4-FFF2-40B4-BE49-F238E27FC236}">
+                <a16:creationId xmlns:a16="http://schemas.microsoft.com/office/drawing/2014/main" id="{40BBAB04-5950-3EAA-CE61-72E1FA63E682}"/>
               </a:ext>
             </a:extLst>
           </p:cNvPr>
@@ -6879,8 +7324,8 @@
         </p:blipFill>
         <p:spPr>
           <a:xfrm>
-            <a:off x="85770" y="3116511"/>
-            <a:ext cx="5227773" cy="3696020"/>
+            <a:off x="0" y="3062911"/>
+            <a:ext cx="6187976" cy="3795089"/>
           </a:xfrm>
           <a:prstGeom prst="rect">
             <a:avLst/>
@@ -6889,10 +7334,10 @@
       </p:pic>
       <p:pic>
         <p:nvPicPr>
-          <p:cNvPr id="11" name="그림 10">
-            <a:extLst>
-              <a:ext uri="{FF2B5EF4-FFF2-40B4-BE49-F238E27FC236}">
-                <a16:creationId xmlns:a16="http://schemas.microsoft.com/office/drawing/2014/main" id="{ED3F8641-2A58-B98F-AFE2-4239E563A4A5}"/>
+          <p:cNvPr id="10" name="그림 9">
+            <a:extLst>
+              <a:ext uri="{FF2B5EF4-FFF2-40B4-BE49-F238E27FC236}">
+                <a16:creationId xmlns:a16="http://schemas.microsoft.com/office/drawing/2014/main" id="{5880E0FA-0152-D6DE-22BF-DFC1E028BA19}"/>
               </a:ext>
             </a:extLst>
           </p:cNvPr>
@@ -6909,8 +7354,38 @@
         </p:blipFill>
         <p:spPr>
           <a:xfrm>
-            <a:off x="5986840" y="3097459"/>
-            <a:ext cx="6119390" cy="3734124"/>
+            <a:off x="7048054" y="3200083"/>
+            <a:ext cx="5143946" cy="3657917"/>
+          </a:xfrm>
+          <a:prstGeom prst="rect">
+            <a:avLst/>
+          </a:prstGeom>
+        </p:spPr>
+      </p:pic>
+      <p:pic>
+        <p:nvPicPr>
+          <p:cNvPr id="5" name="그림 4">
+            <a:extLst>
+              <a:ext uri="{FF2B5EF4-FFF2-40B4-BE49-F238E27FC236}">
+                <a16:creationId xmlns:a16="http://schemas.microsoft.com/office/drawing/2014/main" id="{594A6B20-9414-2606-BE78-1C3F5F55E511}"/>
+              </a:ext>
+            </a:extLst>
+          </p:cNvPr>
+          <p:cNvPicPr>
+            <a:picLocks noChangeAspect="1"/>
+          </p:cNvPicPr>
+          <p:nvPr/>
+        </p:nvPicPr>
+        <p:blipFill>
+          <a:blip r:embed="rId5"/>
+          <a:stretch>
+            <a:fillRect/>
+          </a:stretch>
+        </p:blipFill>
+        <p:spPr>
+          <a:xfrm>
+            <a:off x="6840638" y="11283"/>
+            <a:ext cx="5351362" cy="3697951"/>
           </a:xfrm>
           <a:prstGeom prst="rect">
             <a:avLst/>
@@ -6921,6 +7396,90 @@
     <p:extLst>
       <p:ext uri="{BB962C8B-B14F-4D97-AF65-F5344CB8AC3E}">
         <p14:creationId xmlns:p14="http://schemas.microsoft.com/office/powerpoint/2010/main" val="3977548261"/>
+      </p:ext>
+    </p:extLst>
+  </p:cSld>
+  <p:clrMapOvr>
+    <a:masterClrMapping/>
+  </p:clrMapOvr>
+</p:sld>
+</file>
+
+<file path=ppt/slides/slide18.xml><?xml version="1.0" encoding="utf-8"?>
+<p:sld xmlns:a="http://schemas.openxmlformats.org/drawingml/2006/main" xmlns:r="http://schemas.openxmlformats.org/officeDocument/2006/relationships" xmlns:p="http://schemas.openxmlformats.org/presentationml/2006/main">
+  <p:cSld>
+    <p:spTree>
+      <p:nvGrpSpPr>
+        <p:cNvPr id="1" name=""/>
+        <p:cNvGrpSpPr/>
+        <p:nvPr/>
+      </p:nvGrpSpPr>
+      <p:grpSpPr>
+        <a:xfrm>
+          <a:off x="0" y="0"/>
+          <a:ext cx="0" cy="0"/>
+          <a:chOff x="0" y="0"/>
+          <a:chExt cx="0" cy="0"/>
+        </a:xfrm>
+      </p:grpSpPr>
+      <p:sp>
+        <p:nvSpPr>
+          <p:cNvPr id="2" name="제목 1">
+            <a:extLst>
+              <a:ext uri="{FF2B5EF4-FFF2-40B4-BE49-F238E27FC236}">
+                <a16:creationId xmlns:a16="http://schemas.microsoft.com/office/drawing/2014/main" id="{1B30BFE5-4443-9E48-B223-3091E29C8B9E}"/>
+              </a:ext>
+            </a:extLst>
+          </p:cNvPr>
+          <p:cNvSpPr>
+            <a:spLocks noGrp="1"/>
+          </p:cNvSpPr>
+          <p:nvPr>
+            <p:ph type="title"/>
+          </p:nvPr>
+        </p:nvSpPr>
+        <p:spPr/>
+        <p:txBody>
+          <a:bodyPr/>
+          <a:lstStyle/>
+          <a:p>
+            <a:r>
+              <a:rPr lang="en-US" altLang="ko-KR" dirty="0" err="1"/>
+              <a:t>v2</a:t>
+            </a:r>
+            <a:endParaRPr lang="ko-KR" altLang="en-US" dirty="0"/>
+          </a:p>
+        </p:txBody>
+      </p:sp>
+      <p:sp>
+        <p:nvSpPr>
+          <p:cNvPr id="3" name="내용 개체 틀 2">
+            <a:extLst>
+              <a:ext uri="{FF2B5EF4-FFF2-40B4-BE49-F238E27FC236}">
+                <a16:creationId xmlns:a16="http://schemas.microsoft.com/office/drawing/2014/main" id="{0A1077CD-F0B2-FA20-CFEB-CFEC38EF0564}"/>
+              </a:ext>
+            </a:extLst>
+          </p:cNvPr>
+          <p:cNvSpPr>
+            <a:spLocks noGrp="1"/>
+          </p:cNvSpPr>
+          <p:nvPr>
+            <p:ph idx="1"/>
+          </p:nvPr>
+        </p:nvSpPr>
+        <p:spPr/>
+        <p:txBody>
+          <a:bodyPr/>
+          <a:lstStyle/>
+          <a:p>
+            <a:endParaRPr lang="ko-KR" altLang="en-US"/>
+          </a:p>
+        </p:txBody>
+      </p:sp>
+    </p:spTree>
+    <p:extLst>
+      <p:ext uri="{BB962C8B-B14F-4D97-AF65-F5344CB8AC3E}">
+        <p14:creationId xmlns:p14="http://schemas.microsoft.com/office/powerpoint/2010/main" val="1078359329"/>
       </p:ext>
     </p:extLst>
   </p:cSld>
